--- a/docs/submission/【教育-重庆邮电大学-赵乙亦-证据工作台】.pptx
+++ b/docs/submission/【教育-重庆邮电大学-赵乙亦-证据工作台】.pptx
@@ -5839,7 +5839,7 @@
                           </a:solidFill>
                           <a:latin typeface="Microsoft YaHei"/>
                         </a:rPr>
-                        <a:t>9</a:t>
+                        <a:t>19</a:t>
                       </a:r>
                     </a:p>
                   </a:txBody>
@@ -5857,7 +5857,7 @@
                           </a:solidFill>
                           <a:latin typeface="Microsoft YaHei"/>
                         </a:rPr>
-                        <a:t>173</a:t>
+                        <a:t>288</a:t>
                       </a:r>
                     </a:p>
                   </a:txBody>
@@ -5913,7 +5913,7 @@
                           </a:solidFill>
                           <a:latin typeface="Microsoft YaHei"/>
                         </a:rPr>
-                        <a:t>15</a:t>
+                        <a:t>25</a:t>
                       </a:r>
                     </a:p>
                   </a:txBody>
@@ -5931,7 +5931,7 @@
                           </a:solidFill>
                           <a:latin typeface="Microsoft YaHei"/>
                         </a:rPr>
-                        <a:t>265</a:t>
+                        <a:t>380</a:t>
                       </a:r>
                     </a:p>
                   </a:txBody>
@@ -6254,7 +6254,7 @@
                 </a:solidFill>
                 <a:latin typeface="Microsoft YaHei"/>
               </a:rPr>
-              <a:t>265 个切片，可定位到章节</a:t>
+              <a:t>380 个切片，可定位到章节</a:t>
             </a:r>
           </a:p>
         </p:txBody>
@@ -6993,7 +6993,7 @@
                 </a:solidFill>
                 <a:latin typeface="Microsoft YaHei"/>
               </a:rPr>
-              <a:t>[图：检索块 265 → 单任务保留证据 → fact claims → 通过校验的引用]</a:t>
+              <a:t>[图：检索块 380 → 单任务保留证据 → fact claims → 通过校验的引用]</a:t>
             </a:r>
           </a:p>
         </p:txBody>

--- a/docs/submission/【教育-重庆邮电大学-赵乙亦-证据工作台】.pptx
+++ b/docs/submission/【教育-重庆邮电大学-赵乙亦-证据工作台】.pptx
@@ -5059,7 +5059,7 @@
                 </a:solidFill>
                 <a:latin typeface="Microsoft YaHei"/>
               </a:rPr>
-              <a:t>提示词：中小学使用生成式人工智能辅助教学时，学校和教师需要注意哪些要求？请给出依据条文。</a:t>
+              <a:t>提示词：学校拟引入一款 AI 作业批改工具，请依据教育政策与 AI 教育指南，评估其合规要求并给出依据条文。</a:t>
             </a:r>
           </a:p>
         </p:txBody>

--- a/docs/submission/【教育-重庆邮电大学-赵乙亦-证据工作台】.pptx
+++ b/docs/submission/【教育-重庆邮电大学-赵乙亦-证据工作台】.pptx
@@ -3557,7 +3557,7 @@
                           </a:solidFill>
                           <a:latin typeface="Microsoft YaHei"/>
                         </a:rPr>
-                        <a:t>报告 68 KB</a:t>
+                        <a:t>报告 57 KB</a:t>
                       </a:r>
                     </a:p>
                   </a:txBody>

--- a/docs/submission/【教育-重庆邮电大学-赵乙亦-证据工作台】.pptx
+++ b/docs/submission/【教育-重庆邮电大学-赵乙亦-证据工作台】.pptx
@@ -4897,44 +4897,57 @@
           </a:p>
         </p:txBody>
       </p:sp>
-      <p:sp>
-        <p:nvSpPr>
-          <p:cNvPr id="3" name="TextBox 2"/>
-          <p:cNvSpPr txBox="1"/>
+      <p:pic>
+        <p:nvPicPr>
+          <p:cNvPr id="3" name="Picture 2" descr="login.png"/>
+          <p:cNvPicPr>
+            <a:picLocks noChangeAspect="1"/>
+          </p:cNvPicPr>
           <p:nvPr/>
-        </p:nvSpPr>
-        <p:spPr>
-          <a:xfrm>
-            <a:off x="1097280" y="2011680"/>
-            <a:ext cx="9966960" cy="3291840"/>
+        </p:nvPicPr>
+        <p:blipFill>
+          <a:blip r:embed="rId2"/>
+          <a:stretch>
+            <a:fillRect/>
+          </a:stretch>
+        </p:blipFill>
+        <p:spPr>
+          <a:xfrm>
+            <a:off x="731520" y="1937972"/>
+            <a:ext cx="4206240" cy="3439255"/>
           </a:xfrm>
           <a:prstGeom prst="rect">
             <a:avLst/>
           </a:prstGeom>
-          <a:noFill/>
-        </p:spPr>
-        <p:txBody>
-          <a:bodyPr wrap="square">
-            <a:spAutoFit/>
-          </a:bodyPr>
-          <a:lstStyle/>
-          <a:p>
-            <a:pPr algn="ctr"/>
-            <a:r>
-              <a:rPr sz="2000" b="0">
-                <a:solidFill>
-                  <a:srgbClr val="5B6473"/>
-                </a:solidFill>
-                <a:latin typeface="Microsoft YaHei"/>
-              </a:rPr>
-              <a:t>[截图：登录页 / 工作区与目标输入 / 任务图 + 证据抽屉 / 报告与冲突面板]</a:t>
-            </a:r>
-          </a:p>
-        </p:txBody>
-      </p:sp>
-      <p:sp>
-        <p:nvSpPr>
-          <p:cNvPr id="4" name="TextBox 3"/>
+        </p:spPr>
+      </p:pic>
+      <p:pic>
+        <p:nvPicPr>
+          <p:cNvPr id="4" name="Picture 3" descr="new-task.png"/>
+          <p:cNvPicPr>
+            <a:picLocks noChangeAspect="1"/>
+          </p:cNvPicPr>
+          <p:nvPr/>
+        </p:nvPicPr>
+        <p:blipFill>
+          <a:blip r:embed="rId3"/>
+          <a:stretch>
+            <a:fillRect/>
+          </a:stretch>
+        </p:blipFill>
+        <p:spPr>
+          <a:xfrm>
+            <a:off x="6097801" y="1554480"/>
+            <a:ext cx="4263597" cy="4206240"/>
+          </a:xfrm>
+          <a:prstGeom prst="rect">
+            <a:avLst/>
+          </a:prstGeom>
+        </p:spPr>
+      </p:pic>
+      <p:sp>
+        <p:nvSpPr>
+          <p:cNvPr id="5" name="TextBox 4"/>
           <p:cNvSpPr txBox="1"/>
           <p:nvPr/>
         </p:nvSpPr>
@@ -5072,8 +5085,8 @@
         </p:nvSpPr>
         <p:spPr>
           <a:xfrm>
-            <a:off x="1097280" y="2011680"/>
-            <a:ext cx="9966960" cy="3291840"/>
+            <a:off x="777240" y="4023360"/>
+            <a:ext cx="10607040" cy="1097280"/>
           </a:xfrm>
           <a:prstGeom prst="rect">
             <a:avLst/>
@@ -5086,15 +5099,14 @@
           </a:bodyPr>
           <a:lstStyle/>
           <a:p>
-            <a:pPr algn="ctr"/>
-            <a:r>
-              <a:rPr sz="2000" b="0">
+            <a:r>
+              <a:rPr sz="1500" b="0">
                 <a:solidFill>
                   <a:srgbClr val="5B6473"/>
                 </a:solidFill>
                 <a:latin typeface="Microsoft YaHei"/>
               </a:rPr>
-              <a:t>[截图：报告“结论”与“证据”小节]</a:t>
+              <a:t>运行后，报告在“结论”下逐条列出 [fact] 与依据；点结论可只看它引用的原文（见上一页）。</a:t>
             </a:r>
           </a:p>
         </p:txBody>
@@ -5252,41 +5264,30 @@
           </a:p>
         </p:txBody>
       </p:sp>
-      <p:sp>
-        <p:nvSpPr>
-          <p:cNvPr id="4" name="TextBox 3"/>
-          <p:cNvSpPr txBox="1"/>
+      <p:pic>
+        <p:nvPicPr>
+          <p:cNvPr id="4" name="Picture 3" descr="report-conflicts.png"/>
+          <p:cNvPicPr>
+            <a:picLocks noChangeAspect="1"/>
+          </p:cNvPicPr>
           <p:nvPr/>
-        </p:nvSpPr>
-        <p:spPr>
-          <a:xfrm>
-            <a:off x="1097280" y="2011680"/>
-            <a:ext cx="9966960" cy="3291840"/>
+        </p:nvPicPr>
+        <p:blipFill>
+          <a:blip r:embed="rId2"/>
+          <a:stretch>
+            <a:fillRect/>
+          </a:stretch>
+        </p:blipFill>
+        <p:spPr>
+          <a:xfrm>
+            <a:off x="3965150" y="2743200"/>
+            <a:ext cx="4231218" cy="2834640"/>
           </a:xfrm>
           <a:prstGeom prst="rect">
             <a:avLst/>
           </a:prstGeom>
-          <a:noFill/>
-        </p:spPr>
-        <p:txBody>
-          <a:bodyPr wrap="square">
-            <a:spAutoFit/>
-          </a:bodyPr>
-          <a:lstStyle/>
-          <a:p>
-            <a:pPr algn="ctr"/>
-            <a:r>
-              <a:rPr sz="2000" b="0">
-                <a:solidFill>
-                  <a:srgbClr val="5B6473"/>
-                </a:solidFill>
-                <a:latin typeface="Microsoft YaHei"/>
-              </a:rPr>
-              <a:t>[截图：AI 治理报告 + 冲突候选面板]</a:t>
-            </a:r>
-          </a:p>
-        </p:txBody>
-      </p:sp>
+        </p:spPr>
+      </p:pic>
       <p:sp>
         <p:nvSpPr>
           <p:cNvPr id="5" name="TextBox 4"/>
@@ -6830,41 +6831,30 @@
           </a:p>
         </p:txBody>
       </p:sp>
-      <p:sp>
-        <p:nvSpPr>
-          <p:cNvPr id="3" name="TextBox 2"/>
-          <p:cNvSpPr txBox="1"/>
+      <p:pic>
+        <p:nvPicPr>
+          <p:cNvPr id="3" name="Picture 2" descr="task-graph-crop.png"/>
+          <p:cNvPicPr>
+            <a:picLocks noChangeAspect="1"/>
+          </p:cNvPicPr>
           <p:nvPr/>
-        </p:nvSpPr>
-        <p:spPr>
-          <a:xfrm>
-            <a:off x="1097280" y="2011680"/>
-            <a:ext cx="9966960" cy="3291840"/>
+        </p:nvPicPr>
+        <p:blipFill>
+          <a:blip r:embed="rId2"/>
+          <a:stretch>
+            <a:fillRect/>
+          </a:stretch>
+        </p:blipFill>
+        <p:spPr>
+          <a:xfrm>
+            <a:off x="3863170" y="1463040"/>
+            <a:ext cx="4435179" cy="4846320"/>
           </a:xfrm>
           <a:prstGeom prst="rect">
             <a:avLst/>
           </a:prstGeom>
-          <a:noFill/>
-        </p:spPr>
-        <p:txBody>
-          <a:bodyPr wrap="square">
-            <a:spAutoFit/>
-          </a:bodyPr>
-          <a:lstStyle/>
-          <a:p>
-            <a:pPr algn="ctr"/>
-            <a:r>
-              <a:rPr sz="2000" b="0">
-                <a:solidFill>
-                  <a:srgbClr val="5B6473"/>
-                </a:solidFill>
-                <a:latin typeface="Microsoft YaHei"/>
-              </a:rPr>
-              <a:t>[截图：任务图（两个节点、状态变化）]</a:t>
-            </a:r>
-          </a:p>
-        </p:txBody>
-      </p:sp>
+        </p:spPr>
+      </p:pic>
       <p:sp>
         <p:nvSpPr>
           <p:cNvPr id="4" name="TextBox 3"/>

--- a/docs/submission/【教育-重庆邮电大学-赵乙亦-证据工作台】.pptx
+++ b/docs/submission/【教育-重庆邮电大学-赵乙亦-证据工作台】.pptx
@@ -6836,7 +6836,7 @@
       </p:pic>
       <p:pic>
         <p:nvPicPr>
-          <p:cNvPr id="5" name="Image 1" descr="D:\Development\JiuwenSwarm-review\docs\submission\screenshots\new-task.png">    </p:cNvPr>
+          <p:cNvPr id="5" name="Image 1" descr="D:\Development\JiuwenSwarm-review\docs\submission\screenshots\chat-start.png">    </p:cNvPr>
           <p:cNvPicPr>
             <a:picLocks noChangeAspect="1"/>
           </p:cNvPicPr>
@@ -6849,8 +6849,8 @@
         </p:blipFill>
         <p:spPr>
           <a:xfrm>
-            <a:off x="4937760" y="1554480"/>
-            <a:ext cx="4937760" cy="4114800"/>
+            <a:off x="4846320" y="1554480"/>
+            <a:ext cx="5029200" cy="4114800"/>
           </a:xfrm>
           <a:prstGeom prst="rect">
             <a:avLst/>
@@ -12808,12 +12808,12 @@
         </p:nvSpPr>
         <p:spPr>
           <a:xfrm>
-            <a:off x="640080" y="1508760"/>
-            <a:ext cx="4160520" cy="4617720"/>
+            <a:off x="685800" y="1417320"/>
+            <a:ext cx="10835640" cy="3291840"/>
           </a:xfrm>
           <a:prstGeom prst="roundRect">
             <a:avLst>
-              <a:gd name="adj" fmla="val 1758"/>
+              <a:gd name="adj" fmla="val 2222"/>
             </a:avLst>
           </a:prstGeom>
           <a:solidFill>
@@ -12842,8 +12842,8 @@
         </p:blipFill>
         <p:spPr>
           <a:xfrm>
-            <a:off x="777240" y="1645920"/>
-            <a:ext cx="3886200" cy="4343400"/>
+            <a:off x="868680" y="1536192"/>
+            <a:ext cx="10469880" cy="3063240"/>
           </a:xfrm>
           <a:prstGeom prst="rect">
             <a:avLst/>
@@ -12858,7 +12858,7 @@
         </p:nvSpPr>
         <p:spPr>
           <a:xfrm>
-            <a:off x="5074920" y="1737360"/>
+            <a:off x="777240" y="4983480"/>
             <a:ext cx="384048" cy="384048"/>
           </a:xfrm>
           <a:prstGeom prst="ellipse">
@@ -12883,7 +12883,7 @@
         </p:nvSpPr>
         <p:spPr>
           <a:xfrm>
-            <a:off x="5074920" y="1755648"/>
+            <a:off x="777240" y="5001768"/>
             <a:ext cx="384048" cy="347472"/>
           </a:xfrm>
           <a:prstGeom prst="rect">
@@ -12922,24 +12922,24 @@
         </p:nvSpPr>
         <p:spPr>
           <a:xfrm>
-            <a:off x="5577840" y="1737360"/>
-            <a:ext cx="5760720" cy="320040"/>
-          </a:xfrm>
-          <a:prstGeom prst="rect">
-            <a:avLst/>
-          </a:prstGeom>
-          <a:noFill/>
-          <a:ln/>
-        </p:spPr>
-        <p:txBody>
-          <a:bodyPr wrap="square" lIns="0" tIns="0" rIns="0" bIns="0" rtlCol="0" anchor="t"/>
-          <a:lstStyle/>
-          <a:p>
-            <a:pPr indent="0" marL="0">
-              <a:buNone/>
-            </a:pPr>
-            <a:r>
-              <a:rPr lang="en-US" sz="1700" b="1" dirty="0">
+            <a:off x="1280160" y="4965192"/>
+            <a:ext cx="2834640" cy="320040"/>
+          </a:xfrm>
+          <a:prstGeom prst="rect">
+            <a:avLst/>
+          </a:prstGeom>
+          <a:noFill/>
+          <a:ln/>
+        </p:spPr>
+        <p:txBody>
+          <a:bodyPr wrap="square" lIns="0" tIns="0" rIns="0" bIns="0" rtlCol="0" anchor="t"/>
+          <a:lstStyle/>
+          <a:p>
+            <a:pPr indent="0" marL="0">
+              <a:buNone/>
+            </a:pPr>
+            <a:r>
+              <a:rPr lang="en-US" sz="1600" b="1" dirty="0">
                 <a:solidFill>
                   <a:srgbClr val="16211B"/>
                 </a:solidFill>
@@ -12949,7 +12949,7 @@
               </a:rPr>
               <a:t>原生调度</a:t>
             </a:r>
-            <a:endParaRPr lang="en-US" sz="1700" dirty="0"/>
+            <a:endParaRPr lang="en-US" sz="1600" dirty="0"/>
           </a:p>
         </p:txBody>
       </p:sp>
@@ -12961,8 +12961,8 @@
         </p:nvSpPr>
         <p:spPr>
           <a:xfrm>
-            <a:off x="5577840" y="2103120"/>
-            <a:ext cx="5669280" cy="822960"/>
+            <a:off x="1280160" y="5321808"/>
+            <a:ext cx="2926080" cy="914400"/>
           </a:xfrm>
           <a:prstGeom prst="rect">
             <a:avLst/>
@@ -12981,7 +12981,7 @@
               <a:buNone/>
             </a:pPr>
             <a:r>
-              <a:rPr lang="en-US" sz="1200" dirty="0">
+              <a:rPr lang="en-US" sz="1100" dirty="0">
                 <a:solidFill>
                   <a:srgbClr val="5F6B63"/>
                 </a:solidFill>
@@ -12991,7 +12991,7 @@
               </a:rPr>
               <a:t>scheduled 调度器按 assignee 拉起成员</a:t>
             </a:r>
-            <a:endParaRPr lang="en-US" sz="1200" dirty="0"/>
+            <a:endParaRPr lang="en-US" sz="1100" dirty="0"/>
           </a:p>
         </p:txBody>
       </p:sp>
@@ -13003,7 +13003,7 @@
         </p:nvSpPr>
         <p:spPr>
           <a:xfrm>
-            <a:off x="5074920" y="3154680"/>
+            <a:off x="4389120" y="4983480"/>
             <a:ext cx="384048" cy="384048"/>
           </a:xfrm>
           <a:prstGeom prst="ellipse">
@@ -13028,7 +13028,7 @@
         </p:nvSpPr>
         <p:spPr>
           <a:xfrm>
-            <a:off x="5074920" y="3172968"/>
+            <a:off x="4389120" y="5001768"/>
             <a:ext cx="384048" cy="347472"/>
           </a:xfrm>
           <a:prstGeom prst="rect">
@@ -13067,24 +13067,24 @@
         </p:nvSpPr>
         <p:spPr>
           <a:xfrm>
-            <a:off x="5577840" y="3154680"/>
-            <a:ext cx="5760720" cy="320040"/>
-          </a:xfrm>
-          <a:prstGeom prst="rect">
-            <a:avLst/>
-          </a:prstGeom>
-          <a:noFill/>
-          <a:ln/>
-        </p:spPr>
-        <p:txBody>
-          <a:bodyPr wrap="square" lIns="0" tIns="0" rIns="0" bIns="0" rtlCol="0" anchor="t"/>
-          <a:lstStyle/>
-          <a:p>
-            <a:pPr indent="0" marL="0">
-              <a:buNone/>
-            </a:pPr>
-            <a:r>
-              <a:rPr lang="en-US" sz="1700" b="1" dirty="0">
+            <a:off x="4892040" y="4965192"/>
+            <a:ext cx="2834640" cy="320040"/>
+          </a:xfrm>
+          <a:prstGeom prst="rect">
+            <a:avLst/>
+          </a:prstGeom>
+          <a:noFill/>
+          <a:ln/>
+        </p:spPr>
+        <p:txBody>
+          <a:bodyPr wrap="square" lIns="0" tIns="0" rIns="0" bIns="0" rtlCol="0" anchor="t"/>
+          <a:lstStyle/>
+          <a:p>
+            <a:pPr indent="0" marL="0">
+              <a:buNone/>
+            </a:pPr>
+            <a:r>
+              <a:rPr lang="en-US" sz="1600" b="1" dirty="0">
                 <a:solidFill>
                   <a:srgbClr val="16211B"/>
                 </a:solidFill>
@@ -13094,7 +13094,7 @@
               </a:rPr>
               <a:t>结构化回传</a:t>
             </a:r>
-            <a:endParaRPr lang="en-US" sz="1700" dirty="0"/>
+            <a:endParaRPr lang="en-US" sz="1600" dirty="0"/>
           </a:p>
         </p:txBody>
       </p:sp>
@@ -13106,8 +13106,8 @@
         </p:nvSpPr>
         <p:spPr>
           <a:xfrm>
-            <a:off x="5577840" y="3520440"/>
-            <a:ext cx="5669280" cy="822960"/>
+            <a:off x="4892040" y="5321808"/>
+            <a:ext cx="2926080" cy="914400"/>
           </a:xfrm>
           <a:prstGeom prst="rect">
             <a:avLst/>
@@ -13126,7 +13126,7 @@
               <a:buNone/>
             </a:pPr>
             <a:r>
-              <a:rPr lang="en-US" sz="1200" dirty="0">
+              <a:rPr lang="en-US" sz="1100" dirty="0">
                 <a:solidFill>
                   <a:srgbClr val="5F6B63"/>
                 </a:solidFill>
@@ -13136,7 +13136,7 @@
               </a:rPr>
               <a:t>成员通过受校验的 submit 工具提交 claims / evidence</a:t>
             </a:r>
-            <a:endParaRPr lang="en-US" sz="1200" dirty="0"/>
+            <a:endParaRPr lang="en-US" sz="1100" dirty="0"/>
           </a:p>
         </p:txBody>
       </p:sp>
@@ -13148,7 +13148,7 @@
         </p:nvSpPr>
         <p:spPr>
           <a:xfrm>
-            <a:off x="5074920" y="4572000"/>
+            <a:off x="8001000" y="4983480"/>
             <a:ext cx="384048" cy="384048"/>
           </a:xfrm>
           <a:prstGeom prst="ellipse">
@@ -13173,7 +13173,7 @@
         </p:nvSpPr>
         <p:spPr>
           <a:xfrm>
-            <a:off x="5074920" y="4590288"/>
+            <a:off x="8001000" y="5001768"/>
             <a:ext cx="384048" cy="347472"/>
           </a:xfrm>
           <a:prstGeom prst="rect">
@@ -13212,24 +13212,24 @@
         </p:nvSpPr>
         <p:spPr>
           <a:xfrm>
-            <a:off x="5577840" y="4572000"/>
-            <a:ext cx="5760720" cy="320040"/>
-          </a:xfrm>
-          <a:prstGeom prst="rect">
-            <a:avLst/>
-          </a:prstGeom>
-          <a:noFill/>
-          <a:ln/>
-        </p:spPr>
-        <p:txBody>
-          <a:bodyPr wrap="square" lIns="0" tIns="0" rIns="0" bIns="0" rtlCol="0" anchor="t"/>
-          <a:lstStyle/>
-          <a:p>
-            <a:pPr indent="0" marL="0">
-              <a:buNone/>
-            </a:pPr>
-            <a:r>
-              <a:rPr lang="en-US" sz="1700" b="1" dirty="0">
+            <a:off x="8503920" y="4965192"/>
+            <a:ext cx="2834640" cy="320040"/>
+          </a:xfrm>
+          <a:prstGeom prst="rect">
+            <a:avLst/>
+          </a:prstGeom>
+          <a:noFill/>
+          <a:ln/>
+        </p:spPr>
+        <p:txBody>
+          <a:bodyPr wrap="square" lIns="0" tIns="0" rIns="0" bIns="0" rtlCol="0" anchor="t"/>
+          <a:lstStyle/>
+          <a:p>
+            <a:pPr indent="0" marL="0">
+              <a:buNone/>
+            </a:pPr>
+            <a:r>
+              <a:rPr lang="en-US" sz="1600" b="1" dirty="0">
                 <a:solidFill>
                   <a:srgbClr val="16211B"/>
                 </a:solidFill>
@@ -13239,7 +13239,7 @@
               </a:rPr>
               <a:t>可审计</a:t>
             </a:r>
-            <a:endParaRPr lang="en-US" sz="1700" dirty="0"/>
+            <a:endParaRPr lang="en-US" sz="1600" dirty="0"/>
           </a:p>
         </p:txBody>
       </p:sp>
@@ -13251,8 +13251,8 @@
         </p:nvSpPr>
         <p:spPr>
           <a:xfrm>
-            <a:off x="5577840" y="4937760"/>
-            <a:ext cx="5669280" cy="822960"/>
+            <a:off x="8503920" y="5321808"/>
+            <a:ext cx="2926080" cy="914400"/>
           </a:xfrm>
           <a:prstGeom prst="rect">
             <a:avLst/>
@@ -13271,7 +13271,7 @@
               <a:buNone/>
             </a:pPr>
             <a:r>
-              <a:rPr lang="en-US" sz="1200" dirty="0">
+              <a:rPr lang="en-US" sz="1100" dirty="0">
                 <a:solidFill>
                   <a:srgbClr val="5F6B63"/>
                 </a:solidFill>
@@ -13281,7 +13281,7 @@
               </a:rPr>
               <a:t>每个 result 绑定 execution，过期执行不能覆盖</a:t>
             </a:r>
-            <a:endParaRPr lang="en-US" sz="1200" dirty="0"/>
+            <a:endParaRPr lang="en-US" sz="1100" dirty="0"/>
           </a:p>
         </p:txBody>
       </p:sp>

--- a/docs/submission/【教育-重庆邮电大学-赵乙亦-证据工作台】.pptx
+++ b/docs/submission/【教育-重庆邮电大学-赵乙亦-证据工作台】.pptx
@@ -2956,7 +2956,7 @@
                 <a:ea typeface="Microsoft YaHei" pitchFamily="34" charset="-122"/>
                 <a:cs typeface="Microsoft YaHei" pitchFamily="34" charset="-120"/>
               </a:rPr>
-              <a:t>https://workbench-334475-5-1515867239.sh.run.tcloudbase.com</a:t>
+              <a:t>https://workbench-335317-9-1515867239.sh.run.tcloudbase.com</a:t>
             </a:r>
             <a:endParaRPr lang="en-US" sz="1100" dirty="0"/>
           </a:p>
@@ -8410,7 +8410,7 @@
                 <a:ea typeface="Microsoft YaHei" pitchFamily="34" charset="-122"/>
                 <a:cs typeface="Microsoft YaHei" pitchFamily="34" charset="-120"/>
               </a:rPr>
-              <a:t>https://workbench-334475-5-1515867239.sh.run.tcloudbase.com</a:t>
+              <a:t>https://workbench-335317-9-1515867239.sh.run.tcloudbase.com</a:t>
             </a:r>
             <a:endParaRPr lang="en-US" sz="1300" dirty="0"/>
           </a:p>

--- a/docs/submission/【教育-重庆邮电大学-赵乙亦-证据工作台】.pptx
+++ b/docs/submission/【教育-重庆邮电大学-赵乙亦-证据工作台】.pptx
@@ -14133,7 +14133,7 @@
                 <a:ea typeface="Microsoft YaHei" pitchFamily="34" charset="-122"/>
                 <a:cs typeface="Microsoft YaHei" pitchFamily="34" charset="-120"/>
               </a:rPr>
-              <a:t>39</a:t>
+              <a:t>40</a:t>
             </a:r>
             <a:endParaRPr lang="en-US" sz="3800" dirty="0"/>
           </a:p>
@@ -14211,7 +14211,7 @@
                 <a:ea typeface="Microsoft YaHei" pitchFamily="34" charset="-122"/>
                 <a:cs typeface="Microsoft YaHei" pitchFamily="34" charset="-120"/>
               </a:rPr>
-              <a:t>630 项断言 · 0 失败</a:t>
+              <a:t>645 项断言 · 0 失败</a:t>
             </a:r>
             <a:endParaRPr lang="en-US" sz="1100" dirty="0"/>
           </a:p>
@@ -14277,7 +14277,7 @@
                 <a:ea typeface="Microsoft YaHei" pitchFamily="34" charset="-122"/>
                 <a:cs typeface="Microsoft YaHei" pitchFamily="34" charset="-120"/>
               </a:rPr>
-              <a:t>57 KB</a:t>
+              <a:t>55 KB</a:t>
             </a:r>
             <a:endParaRPr lang="en-US" sz="3800" dirty="0"/>
           </a:p>
@@ -14499,7 +14499,7 @@
                 <a:ea typeface="Microsoft YaHei" pitchFamily="34" charset="-122"/>
                 <a:cs typeface="Microsoft YaHei" pitchFamily="34" charset="-120"/>
               </a:rPr>
-              <a:t>AI 治理 59 KB · 教育 57 KB</a:t>
+              <a:t>AI 治理 59 KB · 教育 55 KB</a:t>
             </a:r>
             <a:endParaRPr lang="en-US" sz="1100" dirty="0"/>
           </a:p>
